--- a/docs/examples/treasurer-snapshot.pptx
+++ b/docs/examples/treasurer-snapshot.pptx
@@ -3310,7 +3310,7 @@
                 </a:solidFill>
                 <a:latin typeface="Arial"/>
               </a:rPr>
-              <a:t>EXAMPLE PTA · TREASURER · FICTIONAL DATA</a:t>
+              <a:t>EXAMPLE Non-profit · TREASURER · FICTIONAL DATA</a:t>
             </a:r>
           </a:p>
         </p:txBody>
